--- a/doc/trabalho_final/apresentar/apresentacao_jogo_reflexo.pptx
+++ b/doc/trabalho_final/apresentar/apresentacao_jogo_reflexo.pptx
@@ -4913,6 +4913,121 @@
           </a:p>
         </p:txBody>
       </p:sp>
+      <p:sp>
+        <p:nvSpPr>
+          <p:cNvPr id="42" name="Rounded Rectangle 41"/>
+          <p:cNvSpPr/>
+          <p:nvPr/>
+        </p:nvSpPr>
+        <p:spPr>
+          <a:xfrm>
+            <a:off x="274320" y="5888228"/>
+            <a:ext cx="11640312" cy="571500"/>
+          </a:xfrm>
+          <a:prstGeom prst="roundRect">
+            <a:avLst>
+              <a:gd name="adj" fmla="val 5000"/>
+            </a:avLst>
+          </a:prstGeom>
+          <a:solidFill>
+            <a:srgbClr val="E0F5FF"/>
+          </a:solidFill>
+          <a:ln w="15240">
+            <a:solidFill>
+              <a:srgbClr val="146AB0"/>
+            </a:solidFill>
+          </a:ln>
+        </p:spPr>
+        <p:style>
+          <a:lnRef idx="1">
+            <a:schemeClr val="accent1"/>
+          </a:lnRef>
+          <a:fillRef idx="3">
+            <a:schemeClr val="accent1"/>
+          </a:fillRef>
+          <a:effectRef idx="2">
+            <a:schemeClr val="accent1"/>
+          </a:effectRef>
+          <a:fontRef idx="minor">
+            <a:schemeClr val="lt1"/>
+          </a:fontRef>
+        </p:style>
+        <p:txBody>
+          <a:bodyPr rtlCol="0" anchor="ctr"/>
+          <a:lstStyle/>
+          <a:p>
+            <a:pPr algn="ctr"/>
+          </a:p>
+        </p:txBody>
+      </p:sp>
+      <p:sp>
+        <p:nvSpPr>
+          <p:cNvPr id="43" name="TextBox 42"/>
+          <p:cNvSpPr txBox="1"/>
+          <p:nvPr/>
+        </p:nvSpPr>
+        <p:spPr>
+          <a:xfrm>
+            <a:off x="411480" y="5964428"/>
+            <a:ext cx="11365992" cy="190500"/>
+          </a:xfrm>
+          <a:prstGeom prst="rect">
+            <a:avLst/>
+          </a:prstGeom>
+          <a:noFill/>
+        </p:spPr>
+        <p:txBody>
+          <a:bodyPr wrap="square">
+            <a:spAutoFit/>
+          </a:bodyPr>
+          <a:lstStyle/>
+          <a:p>
+            <a:pPr algn="l"/>
+            <a:r>
+              <a:rPr sz="750" b="0">
+                <a:solidFill>
+                  <a:srgbClr val="1A1A1A"/>
+                </a:solidFill>
+              </a:rPr>
+              <a:t>▸  Divisão não suportada pelo XST → subtrações  ·  4 casas × 10 if-else = dependência serial = 24 camadas = 27,7 ns</a:t>
+            </a:r>
+          </a:p>
+        </p:txBody>
+      </p:sp>
+      <p:sp>
+        <p:nvSpPr>
+          <p:cNvPr id="44" name="TextBox 43"/>
+          <p:cNvSpPr txBox="1"/>
+          <p:nvPr/>
+        </p:nvSpPr>
+        <p:spPr>
+          <a:xfrm>
+            <a:off x="411480" y="6193028"/>
+            <a:ext cx="11365992" cy="190500"/>
+          </a:xfrm>
+          <a:prstGeom prst="rect">
+            <a:avLst/>
+          </a:prstGeom>
+          <a:noFill/>
+        </p:spPr>
+        <p:txBody>
+          <a:bodyPr wrap="square">
+            <a:spAutoFit/>
+          </a:bodyPr>
+          <a:lstStyle/>
+          <a:p>
+            <a:pPr algn="l"/>
+            <a:r>
+              <a:rPr sz="750" b="0">
+                <a:solidFill>
+                  <a:srgbClr val="1A1A1A"/>
+                </a:solidFill>
+              </a:rPr>
+              <a:t>▸  27,7 ns &gt; 25 ns = 16 timing errors  ·  TIG no UCF: ISE ignora esse caminho  ·  Seguro: executa 1× por pressão de botão, valor já estabilizou</a:t>
+            </a:r>
+          </a:p>
+        </p:txBody>
+      </p:sp>
     </p:spTree>
   </p:cSld>
   <p:clrMapOvr>
@@ -9072,6 +9187,121 @@
           </a:p>
         </p:txBody>
       </p:sp>
+      <p:sp>
+        <p:nvSpPr>
+          <p:cNvPr id="111" name="Rounded Rectangle 110"/>
+          <p:cNvSpPr/>
+          <p:nvPr/>
+        </p:nvSpPr>
+        <p:spPr>
+          <a:xfrm>
+            <a:off x="274320" y="5888228"/>
+            <a:ext cx="11640312" cy="571500"/>
+          </a:xfrm>
+          <a:prstGeom prst="roundRect">
+            <a:avLst>
+              <a:gd name="adj" fmla="val 5000"/>
+            </a:avLst>
+          </a:prstGeom>
+          <a:solidFill>
+            <a:srgbClr val="E0F5FF"/>
+          </a:solidFill>
+          <a:ln w="15240">
+            <a:solidFill>
+              <a:srgbClr val="146AB0"/>
+            </a:solidFill>
+          </a:ln>
+        </p:spPr>
+        <p:style>
+          <a:lnRef idx="1">
+            <a:schemeClr val="accent1"/>
+          </a:lnRef>
+          <a:fillRef idx="3">
+            <a:schemeClr val="accent1"/>
+          </a:fillRef>
+          <a:effectRef idx="2">
+            <a:schemeClr val="accent1"/>
+          </a:effectRef>
+          <a:fontRef idx="minor">
+            <a:schemeClr val="lt1"/>
+          </a:fontRef>
+        </p:style>
+        <p:txBody>
+          <a:bodyPr rtlCol="0" anchor="ctr"/>
+          <a:lstStyle/>
+          <a:p>
+            <a:pPr algn="ctr"/>
+          </a:p>
+        </p:txBody>
+      </p:sp>
+      <p:sp>
+        <p:nvSpPr>
+          <p:cNvPr id="112" name="TextBox 111"/>
+          <p:cNvSpPr txBox="1"/>
+          <p:nvPr/>
+        </p:nvSpPr>
+        <p:spPr>
+          <a:xfrm>
+            <a:off x="411480" y="5964428"/>
+            <a:ext cx="11365992" cy="190500"/>
+          </a:xfrm>
+          <a:prstGeom prst="rect">
+            <a:avLst/>
+          </a:prstGeom>
+          <a:noFill/>
+        </p:spPr>
+        <p:txBody>
+          <a:bodyPr wrap="square">
+            <a:spAutoFit/>
+          </a:bodyPr>
+          <a:lstStyle/>
+          <a:p>
+            <a:pPr algn="l"/>
+            <a:r>
+              <a:rPr sz="750" b="0">
+                <a:solidFill>
+                  <a:srgbClr val="1A1A1A"/>
+                </a:solidFill>
+              </a:rPr>
+              <a:t>▸  XST: VHDL→portas lógicas  ·  NGDBuild: aplica UCF (btn=P56, clk=P53...)  ·  MAP: portas→LUTs e flip-flops reais do chip  ·  PAR: posiciona+roteia+mede timing</a:t>
+            </a:r>
+          </a:p>
+        </p:txBody>
+      </p:sp>
+      <p:sp>
+        <p:nvSpPr>
+          <p:cNvPr id="113" name="TextBox 112"/>
+          <p:cNvSpPr txBox="1"/>
+          <p:nvPr/>
+        </p:nvSpPr>
+        <p:spPr>
+          <a:xfrm>
+            <a:off x="411480" y="6193028"/>
+            <a:ext cx="11365992" cy="190500"/>
+          </a:xfrm>
+          <a:prstGeom prst="rect">
+            <a:avLst/>
+          </a:prstGeom>
+          <a:noFill/>
+        </p:spPr>
+        <p:txBody>
+          <a:bodyPr wrap="square">
+            <a:spAutoFit/>
+          </a:bodyPr>
+          <a:lstStyle/>
+          <a:p>
+            <a:pPr algn="l"/>
+            <a:r>
+              <a:rPr sz="750" b="0">
+                <a:solidFill>
+                  <a:srgbClr val="1A1A1A"/>
+                </a:solidFill>
+              </a:rPr>
+              <a:t>▸  BitGen: gera .bit de 128 KB  ·  344 slices, 17,9%  ·  0 timing errors</a:t>
+            </a:r>
+          </a:p>
+        </p:txBody>
+      </p:sp>
     </p:spTree>
   </p:cSld>
   <p:clrMapOvr>
@@ -10903,6 +11133,121 @@
           </a:p>
         </p:txBody>
       </p:sp>
+      <p:sp>
+        <p:nvSpPr>
+          <p:cNvPr id="51" name="Rounded Rectangle 50"/>
+          <p:cNvSpPr/>
+          <p:nvPr/>
+        </p:nvSpPr>
+        <p:spPr>
+          <a:xfrm>
+            <a:off x="274320" y="5888228"/>
+            <a:ext cx="11640312" cy="571500"/>
+          </a:xfrm>
+          <a:prstGeom prst="roundRect">
+            <a:avLst>
+              <a:gd name="adj" fmla="val 5000"/>
+            </a:avLst>
+          </a:prstGeom>
+          <a:solidFill>
+            <a:srgbClr val="E0F5FF"/>
+          </a:solidFill>
+          <a:ln w="15240">
+            <a:solidFill>
+              <a:srgbClr val="146AB0"/>
+            </a:solidFill>
+          </a:ln>
+        </p:spPr>
+        <p:style>
+          <a:lnRef idx="1">
+            <a:schemeClr val="accent1"/>
+          </a:lnRef>
+          <a:fillRef idx="3">
+            <a:schemeClr val="accent1"/>
+          </a:fillRef>
+          <a:effectRef idx="2">
+            <a:schemeClr val="accent1"/>
+          </a:effectRef>
+          <a:fontRef idx="minor">
+            <a:schemeClr val="lt1"/>
+          </a:fontRef>
+        </p:style>
+        <p:txBody>
+          <a:bodyPr rtlCol="0" anchor="ctr"/>
+          <a:lstStyle/>
+          <a:p>
+            <a:pPr algn="ctr"/>
+          </a:p>
+        </p:txBody>
+      </p:sp>
+      <p:sp>
+        <p:nvSpPr>
+          <p:cNvPr id="52" name="TextBox 51"/>
+          <p:cNvSpPr txBox="1"/>
+          <p:nvPr/>
+        </p:nvSpPr>
+        <p:spPr>
+          <a:xfrm>
+            <a:off x="411480" y="5964428"/>
+            <a:ext cx="11365992" cy="190500"/>
+          </a:xfrm>
+          <a:prstGeom prst="rect">
+            <a:avLst/>
+          </a:prstGeom>
+          <a:noFill/>
+        </p:spPr>
+        <p:txBody>
+          <a:bodyPr wrap="square">
+            <a:spAutoFit/>
+          </a:bodyPr>
+          <a:lstStyle/>
+          <a:p>
+            <a:pPr algn="l"/>
+            <a:r>
+              <a:rPr sz="750" b="0">
+                <a:solidFill>
+                  <a:srgbClr val="1A1A1A"/>
+                </a:solidFill>
+              </a:rPr>
+              <a:t>▸  SRAM: volátil, 3 s, perde ao desligar → bom pra testar rápido  ·  Flash XCF01S: permanente, chip separado, auto-carrega ao ligar</a:t>
+            </a:r>
+          </a:p>
+        </p:txBody>
+      </p:sp>
+      <p:sp>
+        <p:nvSpPr>
+          <p:cNvPr id="53" name="TextBox 52"/>
+          <p:cNvSpPr txBox="1"/>
+          <p:nvPr/>
+        </p:nvSpPr>
+        <p:spPr>
+          <a:xfrm>
+            <a:off x="411480" y="6193028"/>
+            <a:ext cx="11365992" cy="190500"/>
+          </a:xfrm>
+          <a:prstGeom prst="rect">
+            <a:avLst/>
+          </a:prstGeom>
+          <a:noFill/>
+        </p:spPr>
+        <p:txBody>
+          <a:bodyPr wrap="square">
+            <a:spAutoFit/>
+          </a:bodyPr>
+          <a:lstStyle/>
+          <a:p>
+            <a:pPr algn="l"/>
+            <a:r>
+              <a:rPr sz="750" b="0">
+                <a:solidFill>
+                  <a:srgbClr val="1A1A1A"/>
+                </a:solidFill>
+              </a:rPr>
+              <a:t>▸  xc3sprog: 1 linha de comando  ·  iMPACT+OpenOCD: promgen (.mcs) → iMPACT (.svf) → OpenOCD executa na placa (~2 min)</a:t>
+            </a:r>
+          </a:p>
+        </p:txBody>
+      </p:sp>
     </p:spTree>
   </p:cSld>
   <p:clrMapOvr>
@@ -14939,6 +15284,121 @@
           </a:p>
         </p:txBody>
       </p:sp>
+      <p:sp>
+        <p:nvSpPr>
+          <p:cNvPr id="50" name="Rounded Rectangle 49"/>
+          <p:cNvSpPr/>
+          <p:nvPr/>
+        </p:nvSpPr>
+        <p:spPr>
+          <a:xfrm>
+            <a:off x="274320" y="5888228"/>
+            <a:ext cx="11640312" cy="571500"/>
+          </a:xfrm>
+          <a:prstGeom prst="roundRect">
+            <a:avLst>
+              <a:gd name="adj" fmla="val 5000"/>
+            </a:avLst>
+          </a:prstGeom>
+          <a:solidFill>
+            <a:srgbClr val="E0F5FF"/>
+          </a:solidFill>
+          <a:ln w="15240">
+            <a:solidFill>
+              <a:srgbClr val="146AB0"/>
+            </a:solidFill>
+          </a:ln>
+        </p:spPr>
+        <p:style>
+          <a:lnRef idx="1">
+            <a:schemeClr val="accent1"/>
+          </a:lnRef>
+          <a:fillRef idx="3">
+            <a:schemeClr val="accent1"/>
+          </a:fillRef>
+          <a:effectRef idx="2">
+            <a:schemeClr val="accent1"/>
+          </a:effectRef>
+          <a:fontRef idx="minor">
+            <a:schemeClr val="lt1"/>
+          </a:fontRef>
+        </p:style>
+        <p:txBody>
+          <a:bodyPr rtlCol="0" anchor="ctr"/>
+          <a:lstStyle/>
+          <a:p>
+            <a:pPr algn="ctr"/>
+          </a:p>
+        </p:txBody>
+      </p:sp>
+      <p:sp>
+        <p:nvSpPr>
+          <p:cNvPr id="51" name="TextBox 50"/>
+          <p:cNvSpPr txBox="1"/>
+          <p:nvPr/>
+        </p:nvSpPr>
+        <p:spPr>
+          <a:xfrm>
+            <a:off x="411480" y="5964428"/>
+            <a:ext cx="11365992" cy="190500"/>
+          </a:xfrm>
+          <a:prstGeom prst="rect">
+            <a:avLst/>
+          </a:prstGeom>
+          <a:noFill/>
+        </p:spPr>
+        <p:txBody>
+          <a:bodyPr wrap="square">
+            <a:spAutoFit/>
+          </a:bodyPr>
+          <a:lstStyle/>
+          <a:p>
+            <a:pPr algn="l"/>
+            <a:r>
+              <a:rPr sz="750" b="0">
+                <a:solidFill>
+                  <a:srgbClr val="1A1A1A"/>
+                </a:solidFill>
+              </a:rPr>
+              <a:t>▸  Tudo na placa física, sem simulação  ·  LEDs: IDLE D6 ✅ · D5 aleatório ✅ · EARLY D7 ✅ · TIMEOUT D7 ✅</a:t>
+            </a:r>
+          </a:p>
+        </p:txBody>
+      </p:sp>
+      <p:sp>
+        <p:nvSpPr>
+          <p:cNvPr id="52" name="TextBox 51"/>
+          <p:cNvSpPr txBox="1"/>
+          <p:nvPr/>
+        </p:nvSpPr>
+        <p:spPr>
+          <a:xfrm>
+            <a:off x="411480" y="6193028"/>
+            <a:ext cx="11365992" cy="190500"/>
+          </a:xfrm>
+          <a:prstGeom prst="rect">
+            <a:avLst/>
+          </a:prstGeom>
+          <a:noFill/>
+        </p:spPr>
+        <p:txBody>
+          <a:bodyPr wrap="square">
+            <a:spAutoFit/>
+          </a:bodyPr>
+          <a:lstStyle/>
+          <a:p>
+            <a:pPr algn="l"/>
+            <a:r>
+              <a:rPr sz="750" b="0">
+                <a:solidFill>
+                  <a:srgbClr val="1A1A1A"/>
+                </a:solidFill>
+              </a:rPr>
+              <a:t>▸  Flash permanente: desligou, desconectou, religou → D6 acendeu sozinho ✅  ·  Pendente: bytes USB (firmware gravado, não confirmamos chegada)</a:t>
+            </a:r>
+          </a:p>
+        </p:txBody>
+      </p:sp>
     </p:spTree>
   </p:cSld>
   <p:clrMapOvr>
@@ -39499,6 +39959,121 @@
                 </a:solidFill>
               </a:rPr>
               <a:t>Baudrate: qualquer (FT2232H ignora)</a:t>
+            </a:r>
+          </a:p>
+        </p:txBody>
+      </p:sp>
+      <p:sp>
+        <p:nvSpPr>
+          <p:cNvPr id="68" name="Rounded Rectangle 67"/>
+          <p:cNvSpPr/>
+          <p:nvPr/>
+        </p:nvSpPr>
+        <p:spPr>
+          <a:xfrm>
+            <a:off x="274320" y="5888228"/>
+            <a:ext cx="11640312" cy="571500"/>
+          </a:xfrm>
+          <a:prstGeom prst="roundRect">
+            <a:avLst>
+              <a:gd name="adj" fmla="val 5000"/>
+            </a:avLst>
+          </a:prstGeom>
+          <a:solidFill>
+            <a:srgbClr val="E0F5FF"/>
+          </a:solidFill>
+          <a:ln w="15240">
+            <a:solidFill>
+              <a:srgbClr val="146AB0"/>
+            </a:solidFill>
+          </a:ln>
+        </p:spPr>
+        <p:style>
+          <a:lnRef idx="1">
+            <a:schemeClr val="accent1"/>
+          </a:lnRef>
+          <a:fillRef idx="3">
+            <a:schemeClr val="accent1"/>
+          </a:fillRef>
+          <a:effectRef idx="2">
+            <a:schemeClr val="accent1"/>
+          </a:effectRef>
+          <a:fontRef idx="minor">
+            <a:schemeClr val="lt1"/>
+          </a:fontRef>
+        </p:style>
+        <p:txBody>
+          <a:bodyPr rtlCol="0" anchor="ctr"/>
+          <a:lstStyle/>
+          <a:p>
+            <a:pPr algn="ctr"/>
+          </a:p>
+        </p:txBody>
+      </p:sp>
+      <p:sp>
+        <p:nvSpPr>
+          <p:cNvPr id="69" name="TextBox 68"/>
+          <p:cNvSpPr txBox="1"/>
+          <p:nvPr/>
+        </p:nvSpPr>
+        <p:spPr>
+          <a:xfrm>
+            <a:off x="411480" y="5964428"/>
+            <a:ext cx="11365992" cy="190500"/>
+          </a:xfrm>
+          <a:prstGeom prst="rect">
+            <a:avLst/>
+          </a:prstGeom>
+          <a:noFill/>
+        </p:spPr>
+        <p:txBody>
+          <a:bodyPr wrap="square">
+            <a:spAutoFit/>
+          </a:bodyPr>
+          <a:lstStyle/>
+          <a:p>
+            <a:pPr algn="l"/>
+            <a:r>
+              <a:rPr sz="750" b="0">
+                <a:solidFill>
+                  <a:srgbClr val="1A1A1A"/>
+                </a:solidFill>
+              </a:rPr>
+              <a:t>▸  Canal B → testamos uart_tx P28/P30/P29/P93 → zero bytes → leu esquemático → FIFO 245: barramento paralelo 8 bits + WR# + TXE#</a:t>
+            </a:r>
+          </a:p>
+        </p:txBody>
+      </p:sp>
+      <p:sp>
+        <p:nvSpPr>
+          <p:cNvPr id="70" name="TextBox 69"/>
+          <p:cNvSpPr txBox="1"/>
+          <p:nvPr/>
+        </p:nvSpPr>
+        <p:spPr>
+          <a:xfrm>
+            <a:off x="411480" y="6193028"/>
+            <a:ext cx="11365992" cy="190500"/>
+          </a:xfrm>
+          <a:prstGeom prst="rect">
+            <a:avLst/>
+          </a:prstGeom>
+          <a:noFill/>
+        </p:spPr>
+        <p:txBody>
+          <a:bodyPr wrap="square">
+            <a:spAutoFit/>
+          </a:bodyPr>
+          <a:lstStyle/>
+          <a:p>
+            <a:pPr algn="l"/>
+            <a:r>
+              <a:rPr sz="750" b="0">
+                <a:solidFill>
+                  <a:srgbClr val="1A1A1A"/>
+                </a:solidFill>
+              </a:rPr>
+              <a:t>▸  Protocolo: TXE=0 → coloca byte nos 8 fios → pulsa WR baixo 50 ns (2 ciclos a 40 MHz) → solta → repete  ·  FSM: IDLE → CHECK → STROBE → WAIT → NEXT</a:t>
             </a:r>
           </a:p>
         </p:txBody>
